--- a/material/[SeSAC_YDP_6] 06_jQuery.pptx
+++ b/material/[SeSAC_YDP_6] 06_jQuery.pptx
@@ -5,7 +5,7 @@
     <p:sldMasterId id="2147483673" r:id="rId1"/>
   </p:sldMasterIdLst>
   <p:notesMasterIdLst>
-    <p:notesMasterId r:id="rId29"/>
+    <p:notesMasterId r:id="rId28"/>
   </p:notesMasterIdLst>
   <p:sldIdLst>
     <p:sldId id="355" r:id="rId2"/>
@@ -34,7 +34,6 @@
     <p:sldId id="333" r:id="rId25"/>
     <p:sldId id="363" r:id="rId26"/>
     <p:sldId id="348" r:id="rId27"/>
-    <p:sldId id="354" r:id="rId28"/>
   </p:sldIdLst>
   <p:sldSz cx="12192000" cy="6858000"/>
   <p:notesSz cx="6858000" cy="9144000"/>
@@ -1462,39 +1461,39 @@
           <a:lstStyle/>
           <a:p>
             <a:r>
-              <a:rPr lang="ko-KR" altLang="en-US" dirty="0" smtClean="0"/>
+              <a:rPr lang="ko-KR" altLang="en-US" dirty="0"/>
               <a:t>웹 개발자가 </a:t>
             </a:r>
             <a:r>
-              <a:rPr lang="en-US" altLang="ko-KR" dirty="0" smtClean="0"/>
+              <a:rPr lang="en-US" altLang="ko-KR" dirty="0"/>
               <a:t>JS</a:t>
             </a:r>
             <a:r>
-              <a:rPr lang="en-US" altLang="ko-KR" baseline="0" dirty="0" smtClean="0"/>
+              <a:rPr lang="en-US" altLang="ko-KR" baseline="0" dirty="0"/>
               <a:t> </a:t>
             </a:r>
             <a:r>
-              <a:rPr lang="ko-KR" altLang="en-US" dirty="0" smtClean="0"/>
+              <a:rPr lang="ko-KR" altLang="en-US" dirty="0"/>
               <a:t>쉽게 작성할 수 있도록 </a:t>
             </a:r>
             <a:r>
-              <a:rPr lang="ko-KR" altLang="en-US" dirty="0" err="1" smtClean="0"/>
+              <a:rPr lang="ko-KR" altLang="en-US" dirty="0" err="1"/>
               <a:t>설계되어짐</a:t>
             </a:r>
             <a:r>
-              <a:rPr lang="en-US" altLang="ko-KR" dirty="0" smtClean="0"/>
+              <a:rPr lang="en-US" altLang="ko-KR" dirty="0"/>
               <a:t>.</a:t>
             </a:r>
           </a:p>
           <a:p>
-            <a:endParaRPr lang="en-US" altLang="ko-KR" dirty="0" smtClean="0"/>
-          </a:p>
-          <a:p>
-            <a:r>
-              <a:rPr lang="ko-KR" altLang="en-US" dirty="0" smtClean="0"/>
+            <a:endParaRPr lang="en-US" altLang="ko-KR" dirty="0"/>
+          </a:p>
+          <a:p>
+            <a:r>
+              <a:rPr lang="ko-KR" altLang="en-US" dirty="0"/>
               <a:t>라이브러리</a:t>
             </a:r>
-            <a:endParaRPr lang="en-US" altLang="ko-KR" dirty="0" smtClean="0"/>
+            <a:endParaRPr lang="en-US" altLang="ko-KR" dirty="0"/>
           </a:p>
           <a:p>
             <a:pPr marL="171450" indent="-171450">
@@ -1502,11 +1501,11 @@
               <a:buChar char="-"/>
             </a:pPr>
             <a:r>
-              <a:rPr lang="ko-KR" altLang="en-US" baseline="0" dirty="0" smtClean="0"/>
+              <a:rPr lang="ko-KR" altLang="en-US" baseline="0" dirty="0"/>
               <a:t>특정 기능을 수행하기 위해 미리 작성된 코드의 집합</a:t>
             </a:r>
             <a:r>
-              <a:rPr lang="en-US" altLang="ko-KR" baseline="0" dirty="0" smtClean="0"/>
+              <a:rPr lang="en-US" altLang="ko-KR" baseline="0" dirty="0"/>
               <a:t>.</a:t>
             </a:r>
           </a:p>
@@ -1516,31 +1515,31 @@
               <a:buChar char="-"/>
             </a:pPr>
             <a:r>
-              <a:rPr lang="ko-KR" altLang="en-US" baseline="0" dirty="0" smtClean="0"/>
+              <a:rPr lang="ko-KR" altLang="en-US" baseline="0" dirty="0"/>
               <a:t>코드의 </a:t>
             </a:r>
             <a:r>
-              <a:rPr lang="ko-KR" altLang="en-US" baseline="0" dirty="0" err="1" smtClean="0"/>
+              <a:rPr lang="ko-KR" altLang="en-US" baseline="0" dirty="0" err="1"/>
               <a:t>재사용성을</a:t>
             </a:r>
             <a:r>
-              <a:rPr lang="ko-KR" altLang="en-US" baseline="0" dirty="0" smtClean="0"/>
+              <a:rPr lang="ko-KR" altLang="en-US" baseline="0" dirty="0"/>
               <a:t> 극대화</a:t>
             </a:r>
             <a:r>
-              <a:rPr lang="en-US" altLang="ko-KR" baseline="0" dirty="0" smtClean="0"/>
+              <a:rPr lang="en-US" altLang="ko-KR" baseline="0" dirty="0"/>
               <a:t>, </a:t>
             </a:r>
             <a:r>
-              <a:rPr lang="ko-KR" altLang="en-US" baseline="0" dirty="0" smtClean="0"/>
+              <a:rPr lang="ko-KR" altLang="en-US" baseline="0" dirty="0"/>
               <a:t>오류 발생 가능성 </a:t>
             </a:r>
             <a:r>
-              <a:rPr lang="ko-KR" altLang="en-US" baseline="0" dirty="0" err="1" smtClean="0"/>
+              <a:rPr lang="ko-KR" altLang="en-US" baseline="0" dirty="0" err="1"/>
               <a:t>줄여줌</a:t>
             </a:r>
             <a:r>
-              <a:rPr lang="en-US" altLang="ko-KR" baseline="0" dirty="0" smtClean="0"/>
+              <a:rPr lang="en-US" altLang="ko-KR" baseline="0" dirty="0"/>
               <a:t>.</a:t>
             </a:r>
             <a:endParaRPr lang="ko-KR" altLang="en-US" dirty="0"/>
@@ -1667,90 +1666,6 @@
 </p:notes>
 </file>
 
-<file path=ppt/notesSlides/notesSlide21.xml><?xml version="1.0" encoding="utf-8"?>
-<p:notes xmlns:a="http://schemas.openxmlformats.org/drawingml/2006/main" xmlns:r="http://schemas.openxmlformats.org/officeDocument/2006/relationships" xmlns:p="http://schemas.openxmlformats.org/presentationml/2006/main">
-  <p:cSld>
-    <p:spTree>
-      <p:nvGrpSpPr>
-        <p:cNvPr id="1" name=""/>
-        <p:cNvGrpSpPr/>
-        <p:nvPr/>
-      </p:nvGrpSpPr>
-      <p:grpSpPr>
-        <a:xfrm>
-          <a:off x="0" y="0"/>
-          <a:ext cx="0" cy="0"/>
-          <a:chOff x="0" y="0"/>
-          <a:chExt cx="0" cy="0"/>
-        </a:xfrm>
-      </p:grpSpPr>
-      <p:sp>
-        <p:nvSpPr>
-          <p:cNvPr id="2" name="슬라이드 이미지 개체 틀 1"/>
-          <p:cNvSpPr>
-            <a:spLocks noGrp="1" noRot="1" noChangeAspect="1"/>
-          </p:cNvSpPr>
-          <p:nvPr>
-            <p:ph type="sldImg"/>
-          </p:nvPr>
-        </p:nvSpPr>
-        <p:spPr/>
-      </p:sp>
-      <p:sp>
-        <p:nvSpPr>
-          <p:cNvPr id="3" name="슬라이드 노트 개체 틀 2"/>
-          <p:cNvSpPr>
-            <a:spLocks noGrp="1"/>
-          </p:cNvSpPr>
-          <p:nvPr>
-            <p:ph type="body" idx="1"/>
-          </p:nvPr>
-        </p:nvSpPr>
-        <p:spPr/>
-        <p:txBody>
-          <a:bodyPr/>
-          <a:lstStyle/>
-          <a:p>
-            <a:endParaRPr lang="ko-KR" altLang="en-US" dirty="0"/>
-          </a:p>
-        </p:txBody>
-      </p:sp>
-      <p:sp>
-        <p:nvSpPr>
-          <p:cNvPr id="4" name="슬라이드 번호 개체 틀 3"/>
-          <p:cNvSpPr>
-            <a:spLocks noGrp="1"/>
-          </p:cNvSpPr>
-          <p:nvPr>
-            <p:ph type="sldNum" sz="quarter" idx="5"/>
-          </p:nvPr>
-        </p:nvSpPr>
-        <p:spPr/>
-        <p:txBody>
-          <a:bodyPr/>
-          <a:lstStyle/>
-          <a:p>
-            <a:fld id="{C09E5BFC-1559-42F1-8940-AB342D56BF02}" type="slidenum">
-              <a:rPr lang="ko-KR" altLang="en-US" smtClean="0"/>
-              <a:t>27</a:t>
-            </a:fld>
-            <a:endParaRPr lang="ko-KR" altLang="en-US"/>
-          </a:p>
-        </p:txBody>
-      </p:sp>
-    </p:spTree>
-    <p:extLst>
-      <p:ext uri="{BB962C8B-B14F-4D97-AF65-F5344CB8AC3E}">
-        <p14:creationId xmlns:p14="http://schemas.microsoft.com/office/powerpoint/2010/main" val="3403412347"/>
-      </p:ext>
-    </p:extLst>
-  </p:cSld>
-  <p:clrMapOvr>
-    <a:masterClrMapping/>
-  </p:clrMapOvr>
-</p:notes>
-</file>
-
 <file path=ppt/notesSlides/notesSlide3.xml><?xml version="1.0" encoding="utf-8"?>
 <p:notes xmlns:a="http://schemas.openxmlformats.org/drawingml/2006/main" xmlns:r="http://schemas.openxmlformats.org/officeDocument/2006/relationships" xmlns:p="http://schemas.openxmlformats.org/presentationml/2006/main">
   <p:cSld>
@@ -1799,19 +1714,19 @@
               <a:buAutoNum type="arabicPeriod"/>
             </a:pPr>
             <a:r>
-              <a:rPr lang="ko-KR" altLang="en-US" baseline="0" dirty="0" smtClean="0"/>
+              <a:rPr lang="ko-KR" altLang="en-US" baseline="0" dirty="0"/>
               <a:t>여전히 일부 오래된 브라우저에서도 일관된 동작을 보장하기 위해 </a:t>
             </a:r>
             <a:r>
-              <a:rPr lang="en-US" altLang="ko-KR" baseline="0" dirty="0" smtClean="0"/>
+              <a:rPr lang="en-US" altLang="ko-KR" baseline="0" dirty="0"/>
               <a:t>jQuery</a:t>
             </a:r>
             <a:r>
-              <a:rPr lang="ko-KR" altLang="en-US" baseline="0" dirty="0" smtClean="0"/>
+              <a:rPr lang="ko-KR" altLang="en-US" baseline="0" dirty="0"/>
               <a:t>를 사용함</a:t>
             </a:r>
             <a:r>
-              <a:rPr lang="en-US" altLang="ko-KR" baseline="0" dirty="0" smtClean="0"/>
+              <a:rPr lang="en-US" altLang="ko-KR" baseline="0" dirty="0"/>
               <a:t>.</a:t>
             </a:r>
           </a:p>
@@ -1819,22 +1734,22 @@
             <a:pPr marL="228600" indent="-228600">
               <a:buAutoNum type="arabicPeriod"/>
             </a:pPr>
-            <a:endParaRPr lang="en-US" altLang="ko-KR" baseline="0" dirty="0" smtClean="0"/>
+            <a:endParaRPr lang="en-US" altLang="ko-KR" baseline="0" dirty="0"/>
           </a:p>
           <a:p>
             <a:pPr marL="0" indent="0">
               <a:buNone/>
             </a:pPr>
             <a:r>
-              <a:rPr lang="en-US" altLang="ko-KR" baseline="0" dirty="0" smtClean="0"/>
+              <a:rPr lang="en-US" altLang="ko-KR" baseline="0" dirty="0"/>
               <a:t>2. </a:t>
             </a:r>
             <a:r>
-              <a:rPr lang="ko-KR" altLang="en-US" baseline="0" dirty="0" smtClean="0"/>
+              <a:rPr lang="ko-KR" altLang="en-US" baseline="0" dirty="0"/>
               <a:t>작은 프로젝트나 웹 페이지에서는 유용함</a:t>
             </a:r>
             <a:r>
-              <a:rPr lang="en-US" altLang="ko-KR" baseline="0" dirty="0" smtClean="0"/>
+              <a:rPr lang="en-US" altLang="ko-KR" baseline="0" dirty="0"/>
               <a:t>.</a:t>
             </a:r>
           </a:p>
@@ -1842,30 +1757,30 @@
             <a:pPr marL="0" indent="0">
               <a:buNone/>
             </a:pPr>
-            <a:endParaRPr lang="en-US" altLang="ko-KR" baseline="0" dirty="0" smtClean="0"/>
+            <a:endParaRPr lang="en-US" altLang="ko-KR" baseline="0" dirty="0"/>
           </a:p>
           <a:p>
             <a:pPr marL="0" indent="0">
               <a:buNone/>
             </a:pPr>
             <a:r>
-              <a:rPr lang="en-US" altLang="ko-KR" baseline="0" dirty="0" smtClean="0"/>
+              <a:rPr lang="en-US" altLang="ko-KR" baseline="0" dirty="0"/>
               <a:t>3. </a:t>
             </a:r>
             <a:r>
-              <a:rPr lang="ko-KR" altLang="en-US" baseline="0" dirty="0" smtClean="0"/>
+              <a:rPr lang="ko-KR" altLang="en-US" baseline="0" dirty="0"/>
               <a:t>쉬운 문법 </a:t>
             </a:r>
             <a:r>
-              <a:rPr lang="en-US" altLang="ko-KR" baseline="0" dirty="0" smtClean="0"/>
+              <a:rPr lang="en-US" altLang="ko-KR" baseline="0" dirty="0"/>
               <a:t>: JS</a:t>
             </a:r>
             <a:r>
-              <a:rPr lang="ko-KR" altLang="en-US" baseline="0" dirty="0" smtClean="0"/>
+              <a:rPr lang="ko-KR" altLang="en-US" baseline="0" dirty="0"/>
               <a:t>를 더 간결하고 직관적인 문법을 제공하기 때문에 초보자들에게 유용</a:t>
             </a:r>
             <a:r>
-              <a:rPr lang="en-US" altLang="ko-KR" baseline="0" dirty="0" smtClean="0"/>
+              <a:rPr lang="en-US" altLang="ko-KR" baseline="0" dirty="0"/>
               <a:t>.</a:t>
             </a:r>
             <a:endParaRPr lang="ko-KR" altLang="en-US" dirty="0"/>
@@ -1953,97 +1868,97 @@
           <a:lstStyle/>
           <a:p>
             <a:r>
-              <a:rPr lang="en-US" altLang="ko-KR" dirty="0" smtClean="0"/>
+              <a:rPr lang="en-US" altLang="ko-KR" dirty="0"/>
               <a:t>2</a:t>
             </a:r>
             <a:r>
-              <a:rPr lang="ko-KR" altLang="en-US" dirty="0" smtClean="0"/>
+              <a:rPr lang="ko-KR" altLang="en-US" dirty="0"/>
               <a:t>가지 방법</a:t>
             </a:r>
-            <a:endParaRPr lang="en-US" altLang="ko-KR" dirty="0" smtClean="0"/>
-          </a:p>
-          <a:p>
-            <a:endParaRPr lang="en-US" altLang="ko-KR" dirty="0" smtClean="0"/>
-          </a:p>
-          <a:p>
-            <a:r>
-              <a:rPr lang="en-US" altLang="ko-KR" dirty="0" smtClean="0"/>
+            <a:endParaRPr lang="en-US" altLang="ko-KR" dirty="0"/>
+          </a:p>
+          <a:p>
+            <a:endParaRPr lang="en-US" altLang="ko-KR" dirty="0"/>
+          </a:p>
+          <a:p>
+            <a:r>
+              <a:rPr lang="en-US" altLang="ko-KR" dirty="0"/>
               <a:t>jQuery</a:t>
             </a:r>
             <a:r>
-              <a:rPr lang="en-US" altLang="ko-KR" baseline="0" dirty="0" smtClean="0"/>
+              <a:rPr lang="en-US" altLang="ko-KR" baseline="0" dirty="0"/>
               <a:t> </a:t>
             </a:r>
             <a:r>
-              <a:rPr lang="ko-KR" altLang="en-US" baseline="0" dirty="0" smtClean="0"/>
+              <a:rPr lang="ko-KR" altLang="en-US" baseline="0" dirty="0"/>
               <a:t>라이브러리를 사용하기 위해서는 먼저 </a:t>
             </a:r>
             <a:r>
-              <a:rPr lang="en-US" altLang="ko-KR" baseline="0" dirty="0" smtClean="0"/>
+              <a:rPr lang="en-US" altLang="ko-KR" baseline="0" dirty="0"/>
               <a:t>jQuery </a:t>
             </a:r>
             <a:r>
-              <a:rPr lang="ko-KR" altLang="en-US" baseline="0" dirty="0" smtClean="0"/>
+              <a:rPr lang="ko-KR" altLang="en-US" baseline="0" dirty="0"/>
               <a:t>라이브러리 파일을 </a:t>
             </a:r>
             <a:r>
-              <a:rPr lang="en-US" altLang="ko-KR" baseline="0" dirty="0" smtClean="0"/>
+              <a:rPr lang="en-US" altLang="ko-KR" baseline="0" dirty="0"/>
               <a:t>HTML </a:t>
             </a:r>
             <a:r>
-              <a:rPr lang="ko-KR" altLang="en-US" baseline="0" dirty="0" smtClean="0"/>
+              <a:rPr lang="ko-KR" altLang="en-US" baseline="0" dirty="0"/>
               <a:t>문서에 </a:t>
             </a:r>
             <a:r>
-              <a:rPr lang="ko-KR" altLang="en-US" baseline="0" dirty="0" err="1" smtClean="0"/>
+              <a:rPr lang="ko-KR" altLang="en-US" baseline="0" dirty="0" err="1"/>
               <a:t>로딩해야</a:t>
             </a:r>
             <a:r>
-              <a:rPr lang="ko-KR" altLang="en-US" baseline="0" dirty="0" smtClean="0"/>
+              <a:rPr lang="ko-KR" altLang="en-US" baseline="0" dirty="0"/>
               <a:t> 함</a:t>
             </a:r>
             <a:r>
-              <a:rPr lang="en-US" altLang="ko-KR" baseline="0" dirty="0" smtClean="0"/>
+              <a:rPr lang="en-US" altLang="ko-KR" baseline="0" dirty="0"/>
               <a:t>.</a:t>
             </a:r>
           </a:p>
           <a:p>
-            <a:endParaRPr lang="en-US" altLang="ko-KR" baseline="0" dirty="0" smtClean="0"/>
+            <a:endParaRPr lang="en-US" altLang="ko-KR" baseline="0" dirty="0"/>
           </a:p>
           <a:p>
             <a:pPr marL="228600" indent="-228600">
               <a:buAutoNum type="arabicPeriod"/>
             </a:pPr>
             <a:r>
-              <a:rPr lang="en-US" altLang="ko-KR" baseline="0" dirty="0" smtClean="0"/>
+              <a:rPr lang="en-US" altLang="ko-KR" baseline="0" dirty="0"/>
               <a:t>jQuery </a:t>
             </a:r>
             <a:r>
-              <a:rPr lang="ko-KR" altLang="en-US" baseline="0" dirty="0" smtClean="0"/>
+              <a:rPr lang="ko-KR" altLang="en-US" baseline="0" dirty="0"/>
               <a:t>공식 웹사이트에서 다운로드 하거나</a:t>
             </a:r>
-            <a:endParaRPr lang="en-US" altLang="ko-KR" baseline="0" dirty="0" smtClean="0"/>
+            <a:endParaRPr lang="en-US" altLang="ko-KR" baseline="0" dirty="0"/>
           </a:p>
           <a:p>
             <a:pPr marL="228600" indent="-228600">
               <a:buAutoNum type="arabicPeriod"/>
             </a:pPr>
-            <a:endParaRPr lang="en-US" altLang="ko-KR" baseline="0" dirty="0" smtClean="0"/>
+            <a:endParaRPr lang="en-US" altLang="ko-KR" baseline="0" dirty="0"/>
           </a:p>
           <a:p>
             <a:pPr marL="228600" indent="-228600">
               <a:buAutoNum type="arabicPeriod"/>
             </a:pPr>
             <a:r>
-              <a:rPr lang="en-US" altLang="ko-KR" baseline="0" dirty="0" smtClean="0"/>
+              <a:rPr lang="en-US" altLang="ko-KR" baseline="0" dirty="0"/>
               <a:t>CDN</a:t>
             </a:r>
             <a:r>
-              <a:rPr lang="ko-KR" altLang="en-US" baseline="0" dirty="0" smtClean="0"/>
+              <a:rPr lang="ko-KR" altLang="en-US" baseline="0" dirty="0"/>
               <a:t>에서 제공하는 파일을 사용할 수 있음</a:t>
             </a:r>
             <a:r>
-              <a:rPr lang="en-US" altLang="ko-KR" baseline="0" dirty="0" smtClean="0"/>
+              <a:rPr lang="en-US" altLang="ko-KR" baseline="0" dirty="0"/>
               <a:t>.</a:t>
             </a:r>
           </a:p>
@@ -2051,66 +1966,66 @@
             <a:pPr marL="228600" indent="-228600">
               <a:buAutoNum type="arabicPeriod"/>
             </a:pPr>
-            <a:endParaRPr lang="en-US" altLang="ko-KR" baseline="0" dirty="0" smtClean="0"/>
+            <a:endParaRPr lang="en-US" altLang="ko-KR" baseline="0" dirty="0"/>
           </a:p>
           <a:p>
             <a:pPr marL="228600" indent="-228600">
               <a:buAutoNum type="arabicPeriod"/>
             </a:pPr>
-            <a:endParaRPr lang="en-US" altLang="ko-KR" baseline="0" dirty="0" smtClean="0"/>
+            <a:endParaRPr lang="en-US" altLang="ko-KR" baseline="0" dirty="0"/>
           </a:p>
           <a:p>
             <a:pPr marL="0" indent="0">
               <a:buNone/>
             </a:pPr>
             <a:r>
-              <a:rPr lang="ko-KR" altLang="en-US" baseline="0" dirty="0" smtClean="0"/>
+              <a:rPr lang="ko-KR" altLang="en-US" baseline="0" dirty="0"/>
               <a:t>다운로드 하면</a:t>
             </a:r>
-            <a:endParaRPr lang="en-US" altLang="ko-KR" baseline="0" dirty="0" smtClean="0"/>
+            <a:endParaRPr lang="en-US" altLang="ko-KR" baseline="0" dirty="0"/>
           </a:p>
           <a:p>
             <a:pPr marL="0" indent="0">
               <a:buNone/>
             </a:pPr>
             <a:r>
-              <a:rPr lang="en-US" altLang="ko-KR" baseline="0" dirty="0" smtClean="0"/>
+              <a:rPr lang="en-US" altLang="ko-KR" baseline="0" dirty="0"/>
               <a:t>-&gt; </a:t>
             </a:r>
             <a:r>
-              <a:rPr lang="ko-KR" altLang="en-US" baseline="0" dirty="0" smtClean="0"/>
+              <a:rPr lang="ko-KR" altLang="en-US" baseline="0" dirty="0"/>
               <a:t>오프라인 사용 가능 </a:t>
             </a:r>
             <a:r>
-              <a:rPr lang="en-US" altLang="ko-KR" baseline="0" dirty="0" smtClean="0"/>
+              <a:rPr lang="en-US" altLang="ko-KR" baseline="0" dirty="0"/>
               <a:t>– </a:t>
             </a:r>
             <a:r>
-              <a:rPr lang="ko-KR" altLang="en-US" baseline="0" dirty="0" smtClean="0"/>
+              <a:rPr lang="ko-KR" altLang="en-US" baseline="0" dirty="0"/>
               <a:t>로컬에 다운로드 받아 사용</a:t>
             </a:r>
-            <a:endParaRPr lang="en-US" altLang="ko-KR" baseline="0" dirty="0" smtClean="0"/>
+            <a:endParaRPr lang="en-US" altLang="ko-KR" baseline="0" dirty="0"/>
           </a:p>
           <a:p>
             <a:pPr marL="0" indent="0">
               <a:buNone/>
             </a:pPr>
-            <a:endParaRPr lang="en-US" altLang="ko-KR" baseline="0" dirty="0" smtClean="0"/>
+            <a:endParaRPr lang="en-US" altLang="ko-KR" baseline="0" dirty="0"/>
           </a:p>
           <a:p>
             <a:pPr marL="0" indent="0">
               <a:buNone/>
             </a:pPr>
             <a:r>
-              <a:rPr lang="en-US" altLang="ko-KR" baseline="0" dirty="0" smtClean="0"/>
+              <a:rPr lang="en-US" altLang="ko-KR" baseline="0" dirty="0"/>
               <a:t>CDN</a:t>
             </a:r>
             <a:r>
-              <a:rPr lang="ko-KR" altLang="en-US" baseline="0" dirty="0" smtClean="0"/>
+              <a:rPr lang="ko-KR" altLang="en-US" baseline="0" dirty="0"/>
               <a:t>은 인터넷이 연결되어 있어야함</a:t>
             </a:r>
             <a:r>
-              <a:rPr lang="en-US" altLang="ko-KR" baseline="0" dirty="0" smtClean="0"/>
+              <a:rPr lang="en-US" altLang="ko-KR" baseline="0" dirty="0"/>
               <a:t>.</a:t>
             </a:r>
           </a:p>
@@ -2118,38 +2033,38 @@
             <a:pPr marL="0" indent="0">
               <a:buNone/>
             </a:pPr>
-            <a:endParaRPr lang="en-US" altLang="ko-KR" baseline="0" dirty="0" smtClean="0"/>
+            <a:endParaRPr lang="en-US" altLang="ko-KR" baseline="0" dirty="0"/>
           </a:p>
           <a:p>
             <a:pPr marL="0" indent="0">
               <a:buNone/>
             </a:pPr>
             <a:r>
-              <a:rPr lang="en-US" altLang="ko-KR" baseline="0" dirty="0" smtClean="0"/>
+              <a:rPr lang="en-US" altLang="ko-KR" baseline="0" dirty="0"/>
               <a:t>Uncompressed: </a:t>
             </a:r>
             <a:r>
-              <a:rPr lang="ko-KR" altLang="en-US" baseline="0" dirty="0" smtClean="0"/>
+              <a:rPr lang="ko-KR" altLang="en-US" baseline="0" dirty="0"/>
               <a:t>원본 파일</a:t>
             </a:r>
             <a:r>
-              <a:rPr lang="en-US" altLang="ko-KR" baseline="0" dirty="0" smtClean="0"/>
+              <a:rPr lang="en-US" altLang="ko-KR" baseline="0" dirty="0"/>
               <a:t>(</a:t>
             </a:r>
             <a:r>
-              <a:rPr lang="ko-KR" altLang="en-US" baseline="0" dirty="0" err="1" smtClean="0"/>
+              <a:rPr lang="ko-KR" altLang="en-US" baseline="0" dirty="0" err="1"/>
               <a:t>확장자</a:t>
             </a:r>
             <a:r>
-              <a:rPr lang="en-US" altLang="ko-KR" baseline="0" dirty="0" smtClean="0"/>
+              <a:rPr lang="en-US" altLang="ko-KR" baseline="0" dirty="0"/>
               <a:t>: .</a:t>
             </a:r>
             <a:r>
-              <a:rPr lang="en-US" altLang="ko-KR" baseline="0" dirty="0" err="1" smtClean="0"/>
+              <a:rPr lang="en-US" altLang="ko-KR" baseline="0" dirty="0" err="1"/>
               <a:t>js</a:t>
             </a:r>
             <a:r>
-              <a:rPr lang="en-US" altLang="ko-KR" baseline="0" dirty="0" smtClean="0"/>
+              <a:rPr lang="en-US" altLang="ko-KR" baseline="0" dirty="0"/>
               <a:t>)</a:t>
             </a:r>
           </a:p>
@@ -2158,23 +2073,23 @@
               <a:buNone/>
             </a:pPr>
             <a:r>
-              <a:rPr lang="en-US" altLang="ko-KR" baseline="0" dirty="0" smtClean="0"/>
+              <a:rPr lang="en-US" altLang="ko-KR" baseline="0" dirty="0"/>
               <a:t>Minified: </a:t>
             </a:r>
             <a:r>
-              <a:rPr lang="ko-KR" altLang="en-US" baseline="0" dirty="0" smtClean="0"/>
+              <a:rPr lang="ko-KR" altLang="en-US" baseline="0" dirty="0"/>
               <a:t>원본을 압축한 파일</a:t>
             </a:r>
             <a:r>
-              <a:rPr lang="en-US" altLang="ko-KR" baseline="0" dirty="0" smtClean="0"/>
+              <a:rPr lang="en-US" altLang="ko-KR" baseline="0" dirty="0"/>
               <a:t>(</a:t>
             </a:r>
             <a:r>
-              <a:rPr lang="ko-KR" altLang="en-US" baseline="0" dirty="0" err="1" smtClean="0"/>
+              <a:rPr lang="ko-KR" altLang="en-US" baseline="0" dirty="0" err="1"/>
               <a:t>확장자</a:t>
             </a:r>
             <a:r>
-              <a:rPr lang="en-US" altLang="ko-KR" baseline="0" dirty="0" smtClean="0"/>
+              <a:rPr lang="en-US" altLang="ko-KR" baseline="0" dirty="0"/>
               <a:t> : .min.js</a:t>
             </a:r>
           </a:p>
@@ -2183,23 +2098,23 @@
               <a:buNone/>
             </a:pPr>
             <a:r>
-              <a:rPr lang="en-US" altLang="ko-KR" baseline="0" dirty="0" smtClean="0"/>
+              <a:rPr lang="en-US" altLang="ko-KR" baseline="0" dirty="0"/>
               <a:t>Slim: </a:t>
             </a:r>
             <a:r>
-              <a:rPr lang="ko-KR" altLang="en-US" baseline="0" dirty="0" smtClean="0"/>
+              <a:rPr lang="ko-KR" altLang="en-US" baseline="0" dirty="0"/>
               <a:t>해당 버전에서 </a:t>
             </a:r>
             <a:r>
-              <a:rPr lang="ko-KR" altLang="en-US" baseline="0" dirty="0" err="1" smtClean="0"/>
+              <a:rPr lang="ko-KR" altLang="en-US" baseline="0" dirty="0" err="1"/>
               <a:t>필요없다고</a:t>
             </a:r>
             <a:r>
-              <a:rPr lang="ko-KR" altLang="en-US" baseline="0" dirty="0" smtClean="0"/>
+              <a:rPr lang="ko-KR" altLang="en-US" baseline="0" dirty="0"/>
               <a:t> 생각하는 라이브러리를 제거한 파일 </a:t>
             </a:r>
             <a:r>
-              <a:rPr lang="en-US" altLang="ko-KR" baseline="0" dirty="0" smtClean="0"/>
+              <a:rPr lang="en-US" altLang="ko-KR" baseline="0" dirty="0"/>
               <a:t>(.slim.js)</a:t>
             </a:r>
           </a:p>
@@ -2208,15 +2123,15 @@
               <a:buNone/>
             </a:pPr>
             <a:r>
-              <a:rPr lang="en-US" altLang="ko-KR" baseline="0" dirty="0" smtClean="0"/>
+              <a:rPr lang="en-US" altLang="ko-KR" baseline="0" dirty="0"/>
               <a:t>Slim minified: slim </a:t>
             </a:r>
             <a:r>
-              <a:rPr lang="ko-KR" altLang="en-US" baseline="0" dirty="0" smtClean="0"/>
+              <a:rPr lang="ko-KR" altLang="en-US" baseline="0" dirty="0"/>
               <a:t>파일을 압축한 파일</a:t>
             </a:r>
             <a:r>
-              <a:rPr lang="en-US" altLang="ko-KR" baseline="0" dirty="0" smtClean="0"/>
+              <a:rPr lang="en-US" altLang="ko-KR" baseline="0" dirty="0"/>
               <a:t>(.slim.min.js)</a:t>
             </a:r>
           </a:p>
@@ -2309,64 +2224,64 @@
           <a:lstStyle/>
           <a:p>
             <a:r>
-              <a:rPr lang="en-US" altLang="ko-KR" dirty="0" smtClean="0"/>
+              <a:rPr lang="en-US" altLang="ko-KR" dirty="0"/>
               <a:t>$</a:t>
             </a:r>
             <a:r>
-              <a:rPr lang="ko-KR" altLang="en-US" dirty="0" smtClean="0"/>
+              <a:rPr lang="ko-KR" altLang="en-US" dirty="0"/>
               <a:t>는 </a:t>
             </a:r>
             <a:r>
-              <a:rPr lang="en-US" altLang="ko-KR" dirty="0" smtClean="0"/>
+              <a:rPr lang="en-US" altLang="ko-KR" dirty="0"/>
               <a:t>jQuery</a:t>
             </a:r>
             <a:r>
-              <a:rPr lang="en-US" altLang="ko-KR" baseline="0" dirty="0" smtClean="0"/>
+              <a:rPr lang="en-US" altLang="ko-KR" baseline="0" dirty="0"/>
               <a:t> </a:t>
             </a:r>
             <a:r>
-              <a:rPr lang="ko-KR" altLang="en-US" baseline="0" dirty="0" smtClean="0"/>
+              <a:rPr lang="ko-KR" altLang="en-US" baseline="0" dirty="0"/>
               <a:t>함수</a:t>
             </a:r>
-            <a:endParaRPr lang="en-US" altLang="ko-KR" baseline="0" dirty="0" smtClean="0"/>
-          </a:p>
-          <a:p>
-            <a:r>
-              <a:rPr lang="en-US" altLang="ko-KR" baseline="0" dirty="0" smtClean="0"/>
+            <a:endParaRPr lang="en-US" altLang="ko-KR" baseline="0" dirty="0"/>
+          </a:p>
+          <a:p>
+            <a:r>
+              <a:rPr lang="en-US" altLang="ko-KR" baseline="0" dirty="0"/>
               <a:t>$() </a:t>
             </a:r>
             <a:r>
-              <a:rPr lang="ko-KR" altLang="en-US" baseline="0" dirty="0" smtClean="0"/>
+              <a:rPr lang="ko-KR" altLang="en-US" baseline="0" dirty="0"/>
               <a:t>함수를 호출해서 </a:t>
             </a:r>
             <a:r>
-              <a:rPr lang="en-US" altLang="ko-KR" baseline="0" dirty="0" smtClean="0"/>
+              <a:rPr lang="en-US" altLang="ko-KR" baseline="0" dirty="0"/>
               <a:t>HTML </a:t>
             </a:r>
             <a:r>
-              <a:rPr lang="ko-KR" altLang="en-US" baseline="0" dirty="0" smtClean="0"/>
+              <a:rPr lang="ko-KR" altLang="en-US" baseline="0" dirty="0"/>
               <a:t>요소를 선택하고 조작 가능</a:t>
             </a:r>
-            <a:endParaRPr lang="en-US" altLang="ko-KR" baseline="0" dirty="0" smtClean="0"/>
-          </a:p>
-          <a:p>
-            <a:endParaRPr lang="en-US" altLang="ko-KR" baseline="0" dirty="0" smtClean="0"/>
-          </a:p>
-          <a:p>
-            <a:r>
-              <a:rPr lang="en-US" altLang="ko-KR" baseline="0" dirty="0" smtClean="0"/>
+            <a:endParaRPr lang="en-US" altLang="ko-KR" baseline="0" dirty="0"/>
+          </a:p>
+          <a:p>
+            <a:endParaRPr lang="en-US" altLang="ko-KR" baseline="0" dirty="0"/>
+          </a:p>
+          <a:p>
+            <a:r>
+              <a:rPr lang="en-US" altLang="ko-KR" baseline="0" dirty="0"/>
               <a:t>CSS </a:t>
             </a:r>
             <a:r>
-              <a:rPr lang="ko-KR" altLang="en-US" baseline="0" dirty="0" err="1" smtClean="0"/>
+              <a:rPr lang="ko-KR" altLang="en-US" baseline="0" dirty="0" err="1"/>
               <a:t>선택자를</a:t>
             </a:r>
             <a:r>
-              <a:rPr lang="ko-KR" altLang="en-US" baseline="0" dirty="0" smtClean="0"/>
+              <a:rPr lang="ko-KR" altLang="en-US" baseline="0" dirty="0"/>
               <a:t> 인자로 받음</a:t>
             </a:r>
             <a:r>
-              <a:rPr lang="en-US" altLang="ko-KR" baseline="0" dirty="0" smtClean="0"/>
+              <a:rPr lang="en-US" altLang="ko-KR" baseline="0" dirty="0"/>
               <a:t>.</a:t>
             </a:r>
             <a:endParaRPr lang="ko-KR" altLang="en-US" dirty="0"/>
@@ -2538,11 +2453,11 @@
           <a:lstStyle/>
           <a:p>
             <a:r>
-              <a:rPr lang="ko-KR" altLang="en-US" dirty="0" smtClean="0"/>
+              <a:rPr lang="ko-KR" altLang="en-US" dirty="0"/>
               <a:t>아래와 같은 코드</a:t>
             </a:r>
             <a:r>
-              <a:rPr lang="en-US" altLang="ko-KR" dirty="0" smtClean="0"/>
+              <a:rPr lang="en-US" altLang="ko-KR" dirty="0"/>
               <a:t>!</a:t>
             </a:r>
             <a:endParaRPr lang="ko-KR" altLang="en-US" dirty="0"/>
@@ -2714,10 +2629,9 @@
           <a:lstStyle/>
           <a:p>
             <a:r>
-              <a:rPr lang="ko-KR" altLang="en-US" dirty="0" smtClean="0"/>
+              <a:rPr lang="ko-KR" altLang="en-US" dirty="0"/>
               <a:t>아래와 같은 코드</a:t>
             </a:r>
-            <a:endParaRPr lang="ko-KR" altLang="en-US" dirty="0"/>
           </a:p>
         </p:txBody>
       </p:sp>
@@ -8911,10 +8825,9 @@
               <a:t>.  </a:t>
             </a:r>
             <a:r>
-              <a:rPr lang="ko-KR" altLang="en-US" dirty="0" smtClean="0"/>
+              <a:rPr lang="ko-KR" altLang="en-US" dirty="0"/>
               <a:t>이미지 바꾸기</a:t>
             </a:r>
-            <a:endParaRPr lang="ko-KR" altLang="en-US" dirty="0"/>
           </a:p>
         </p:txBody>
       </p:sp>
@@ -9188,15 +9101,6 @@
               </a:rPr>
               <a:t>강의 클릭</a:t>
             </a:r>
-            <a:r>
-              <a:rPr lang="en-US" altLang="ko-KR" dirty="0">
-                <a:solidFill>
-                  <a:srgbClr val="212529"/>
-                </a:solidFill>
-                <a:latin typeface="+mn-ea"/>
-              </a:rPr>
-              <a:t/>
-            </a:r>
             <a:br>
               <a:rPr lang="en-US" altLang="ko-KR" dirty="0">
                 <a:solidFill>
@@ -9224,34 +9128,16 @@
               <a:t>➡ </a:t>
             </a:r>
             <a:r>
-              <a:rPr lang="en-US" altLang="ko-KR" sz="2800" b="1" dirty="0" smtClean="0">
+              <a:rPr lang="en-US" altLang="ko-KR" sz="2800" b="1" dirty="0">
                 <a:solidFill>
                   <a:srgbClr val="212529"/>
                 </a:solidFill>
                 <a:latin typeface="+mn-ea"/>
               </a:rPr>
-              <a:t>[</a:t>
-            </a:r>
-            <a:r>
-              <a:rPr lang="en-US" altLang="ko-KR" sz="2800" b="1" dirty="0" smtClean="0">
-                <a:solidFill>
-                  <a:srgbClr val="212529"/>
-                </a:solidFill>
-                <a:latin typeface="+mn-ea"/>
-              </a:rPr>
-              <a:t>jQuery</a:t>
-            </a:r>
-            <a:r>
-              <a:rPr lang="en-US" altLang="ko-KR" sz="2800" b="1" dirty="0" smtClean="0">
-                <a:solidFill>
-                  <a:srgbClr val="212529"/>
-                </a:solidFill>
-                <a:latin typeface="+mn-ea"/>
-              </a:rPr>
-              <a:t> </a:t>
-            </a:r>
-            <a:r>
-              <a:rPr lang="ko-KR" altLang="en-US" sz="2800" b="1" dirty="0" smtClean="0">
+              <a:t>[jQuery </a:t>
+            </a:r>
+            <a:r>
+              <a:rPr lang="ko-KR" altLang="en-US" sz="2800" b="1" dirty="0">
                 <a:solidFill>
                   <a:srgbClr val="212529"/>
                 </a:solidFill>
@@ -9260,7 +9146,7 @@
               <a:t>실습</a:t>
             </a:r>
             <a:r>
-              <a:rPr lang="en-US" altLang="ko-KR" sz="2800" b="1" dirty="0" smtClean="0">
+              <a:rPr lang="en-US" altLang="ko-KR" sz="2800" b="1" dirty="0">
                 <a:solidFill>
                   <a:srgbClr val="212529"/>
                 </a:solidFill>
@@ -9269,7 +9155,7 @@
               <a:t>]</a:t>
             </a:r>
             <a:r>
-              <a:rPr lang="en-US" altLang="ko-KR" sz="2800" dirty="0" smtClean="0">
+              <a:rPr lang="en-US" altLang="ko-KR" sz="2800" dirty="0">
                 <a:solidFill>
                   <a:srgbClr val="212529"/>
                 </a:solidFill>
@@ -9305,7 +9191,7 @@
               <a:t>➡ </a:t>
             </a:r>
             <a:r>
-              <a:rPr lang="en-US" altLang="ko-KR" sz="2800" b="1" dirty="0" smtClean="0">
+              <a:rPr lang="en-US" altLang="ko-KR" sz="2800" b="1" dirty="0">
                 <a:solidFill>
                   <a:schemeClr val="accent1"/>
                 </a:solidFill>
@@ -9314,7 +9200,7 @@
               <a:t>[</a:t>
             </a:r>
             <a:r>
-              <a:rPr lang="ko-KR" altLang="en-US" sz="2800" b="1" dirty="0" smtClean="0">
+              <a:rPr lang="ko-KR" altLang="en-US" sz="2800" b="1" dirty="0">
                 <a:solidFill>
                   <a:schemeClr val="accent1"/>
                 </a:solidFill>
@@ -9323,7 +9209,7 @@
               <a:t>과일 사진 변경하기</a:t>
             </a:r>
             <a:r>
-              <a:rPr lang="en-US" altLang="ko-KR" sz="2800" b="1" dirty="0" smtClean="0">
+              <a:rPr lang="en-US" altLang="ko-KR" sz="2800" b="1" dirty="0">
                 <a:solidFill>
                   <a:schemeClr val="accent1"/>
                 </a:solidFill>
@@ -9332,7 +9218,7 @@
               <a:t>]</a:t>
             </a:r>
             <a:r>
-              <a:rPr lang="en-US" altLang="ko-KR" sz="2800" dirty="0" smtClean="0">
+              <a:rPr lang="en-US" altLang="ko-KR" sz="2800" dirty="0">
                 <a:solidFill>
                   <a:schemeClr val="accent1"/>
                 </a:solidFill>
@@ -9341,22 +9227,13 @@
               <a:t> </a:t>
             </a:r>
             <a:r>
-              <a:rPr lang="ko-KR" altLang="en-US" sz="2800" dirty="0" smtClean="0">
+              <a:rPr lang="ko-KR" altLang="en-US" sz="2800" dirty="0">
                 <a:solidFill>
                   <a:srgbClr val="212529"/>
                 </a:solidFill>
                 <a:latin typeface="+mn-ea"/>
               </a:rPr>
-              <a:t> </a:t>
-            </a:r>
-            <a:r>
-              <a:rPr lang="ko-KR" altLang="en-US" sz="2800" dirty="0">
-                <a:solidFill>
-                  <a:srgbClr val="212529"/>
-                </a:solidFill>
-                <a:latin typeface="+mn-ea"/>
-              </a:rPr>
-              <a:t>진행</a:t>
+              <a:t> 진행</a:t>
             </a:r>
           </a:p>
         </p:txBody>
@@ -9528,10 +9405,9 @@
               <a:t>.  </a:t>
             </a:r>
             <a:r>
-              <a:rPr lang="ko-KR" altLang="en-US" dirty="0" smtClean="0"/>
+              <a:rPr lang="ko-KR" altLang="en-US" dirty="0"/>
               <a:t>사각형 색상 변경하기</a:t>
             </a:r>
-            <a:endParaRPr lang="ko-KR" altLang="en-US" dirty="0"/>
           </a:p>
         </p:txBody>
       </p:sp>
@@ -9805,15 +9681,6 @@
               </a:rPr>
               <a:t>강의 클릭</a:t>
             </a:r>
-            <a:r>
-              <a:rPr lang="en-US" altLang="ko-KR" dirty="0">
-                <a:solidFill>
-                  <a:srgbClr val="212529"/>
-                </a:solidFill>
-                <a:latin typeface="+mn-ea"/>
-              </a:rPr>
-              <a:t/>
-            </a:r>
             <a:br>
               <a:rPr lang="en-US" altLang="ko-KR" dirty="0">
                 <a:solidFill>
@@ -9841,34 +9708,16 @@
               <a:t>➡ </a:t>
             </a:r>
             <a:r>
-              <a:rPr lang="en-US" altLang="ko-KR" sz="2800" b="1" dirty="0" smtClean="0">
+              <a:rPr lang="en-US" altLang="ko-KR" sz="2800" b="1" dirty="0">
                 <a:solidFill>
                   <a:srgbClr val="212529"/>
                 </a:solidFill>
                 <a:latin typeface="+mn-ea"/>
               </a:rPr>
-              <a:t>[</a:t>
-            </a:r>
-            <a:r>
-              <a:rPr lang="en-US" altLang="ko-KR" sz="2800" b="1" dirty="0" smtClean="0">
-                <a:solidFill>
-                  <a:srgbClr val="212529"/>
-                </a:solidFill>
-                <a:latin typeface="+mn-ea"/>
-              </a:rPr>
-              <a:t>jQuery</a:t>
-            </a:r>
-            <a:r>
-              <a:rPr lang="en-US" altLang="ko-KR" sz="2800" b="1" dirty="0" smtClean="0">
-                <a:solidFill>
-                  <a:srgbClr val="212529"/>
-                </a:solidFill>
-                <a:latin typeface="+mn-ea"/>
-              </a:rPr>
-              <a:t> </a:t>
-            </a:r>
-            <a:r>
-              <a:rPr lang="ko-KR" altLang="en-US" sz="2800" b="1" dirty="0" smtClean="0">
+              <a:t>[jQuery </a:t>
+            </a:r>
+            <a:r>
+              <a:rPr lang="ko-KR" altLang="en-US" sz="2800" b="1" dirty="0">
                 <a:solidFill>
                   <a:srgbClr val="212529"/>
                 </a:solidFill>
@@ -9877,7 +9726,7 @@
               <a:t>실습</a:t>
             </a:r>
             <a:r>
-              <a:rPr lang="en-US" altLang="ko-KR" sz="2800" b="1" dirty="0" smtClean="0">
+              <a:rPr lang="en-US" altLang="ko-KR" sz="2800" b="1" dirty="0">
                 <a:solidFill>
                   <a:srgbClr val="212529"/>
                 </a:solidFill>
@@ -9886,7 +9735,7 @@
               <a:t>]</a:t>
             </a:r>
             <a:r>
-              <a:rPr lang="en-US" altLang="ko-KR" sz="2800" dirty="0" smtClean="0">
+              <a:rPr lang="en-US" altLang="ko-KR" sz="2800" dirty="0">
                 <a:solidFill>
                   <a:srgbClr val="212529"/>
                 </a:solidFill>
@@ -9922,7 +9771,7 @@
               <a:t>➡ </a:t>
             </a:r>
             <a:r>
-              <a:rPr lang="en-US" altLang="ko-KR" sz="2800" b="1" dirty="0" smtClean="0">
+              <a:rPr lang="en-US" altLang="ko-KR" sz="2800" b="1" dirty="0">
                 <a:solidFill>
                   <a:schemeClr val="accent1"/>
                 </a:solidFill>
@@ -9931,7 +9780,7 @@
               <a:t>[</a:t>
             </a:r>
             <a:r>
-              <a:rPr lang="ko-KR" altLang="en-US" sz="2800" b="1" dirty="0" smtClean="0">
+              <a:rPr lang="ko-KR" altLang="en-US" sz="2800" b="1" dirty="0">
                 <a:solidFill>
                   <a:schemeClr val="accent1"/>
                 </a:solidFill>
@@ -9940,7 +9789,7 @@
               <a:t>사각형 색상 변경하기</a:t>
             </a:r>
             <a:r>
-              <a:rPr lang="en-US" altLang="ko-KR" sz="2800" b="1" dirty="0" smtClean="0">
+              <a:rPr lang="en-US" altLang="ko-KR" sz="2800" b="1" dirty="0">
                 <a:solidFill>
                   <a:schemeClr val="accent1"/>
                 </a:solidFill>
@@ -9949,7 +9798,7 @@
               <a:t>]</a:t>
             </a:r>
             <a:r>
-              <a:rPr lang="en-US" altLang="ko-KR" sz="2800" dirty="0" smtClean="0">
+              <a:rPr lang="en-US" altLang="ko-KR" sz="2800" dirty="0">
                 <a:solidFill>
                   <a:schemeClr val="accent1"/>
                 </a:solidFill>
@@ -9958,22 +9807,13 @@
               <a:t> </a:t>
             </a:r>
             <a:r>
-              <a:rPr lang="ko-KR" altLang="en-US" sz="2800" dirty="0" smtClean="0">
+              <a:rPr lang="ko-KR" altLang="en-US" sz="2800" dirty="0">
                 <a:solidFill>
                   <a:srgbClr val="212529"/>
                 </a:solidFill>
                 <a:latin typeface="+mn-ea"/>
               </a:rPr>
-              <a:t> </a:t>
-            </a:r>
-            <a:r>
-              <a:rPr lang="ko-KR" altLang="en-US" sz="2800" dirty="0">
-                <a:solidFill>
-                  <a:srgbClr val="212529"/>
-                </a:solidFill>
-                <a:latin typeface="+mn-ea"/>
-              </a:rPr>
-              <a:t>진행</a:t>
+              <a:t> 진행</a:t>
             </a:r>
           </a:p>
         </p:txBody>
@@ -10177,15 +10017,15 @@
           <a:lstStyle/>
           <a:p>
             <a:r>
-              <a:rPr lang="en-US" altLang="ko-KR" sz="8000" dirty="0" smtClean="0"/>
+              <a:rPr lang="en-US" altLang="ko-KR" sz="8000" dirty="0"/>
               <a:t>jQuery </a:t>
             </a:r>
             <a:r>
-              <a:rPr lang="ko-KR" altLang="en-US" sz="8000" dirty="0" smtClean="0"/>
+              <a:rPr lang="ko-KR" altLang="en-US" sz="8000" dirty="0"/>
               <a:t>이벤트 </a:t>
             </a:r>
             <a:r>
-              <a:rPr lang="ko-KR" altLang="en-US" sz="8000" dirty="0" err="1" smtClean="0"/>
+              <a:rPr lang="ko-KR" altLang="en-US" sz="8000" dirty="0" err="1"/>
               <a:t>리스너</a:t>
             </a:r>
             <a:endParaRPr lang="ko-KR" altLang="en-US" sz="8000" dirty="0"/>
@@ -10256,74 +10096,70 @@
             </a:r>
             <a:r>
               <a:rPr lang="ko-KR" altLang="en-US" dirty="0"/>
-              <a:t>를 담당하는 </a:t>
-            </a:r>
-            <a:r>
-              <a:rPr lang="ko-KR" altLang="en-US" dirty="0" smtClean="0"/>
-              <a:t>함수</a:t>
-            </a:r>
-            <a:endParaRPr lang="en-US" altLang="ko-KR" dirty="0" smtClean="0"/>
-          </a:p>
-          <a:p>
-            <a:r>
-              <a:rPr lang="en-US" altLang="ko-KR" dirty="0" smtClean="0"/>
+              <a:t>를 담당하는 함수</a:t>
+            </a:r>
+            <a:endParaRPr lang="en-US" altLang="ko-KR" dirty="0"/>
+          </a:p>
+          <a:p>
+            <a:r>
+              <a:rPr lang="en-US" altLang="ko-KR" dirty="0"/>
               <a:t>Event listener = Event handler</a:t>
             </a:r>
           </a:p>
           <a:p>
             <a:r>
-              <a:rPr lang="ko-KR" altLang="en-US" dirty="0" smtClean="0"/>
+              <a:rPr lang="ko-KR" altLang="en-US" dirty="0"/>
               <a:t>이벤트 </a:t>
             </a:r>
-            <a:endParaRPr lang="en-US" altLang="ko-KR" dirty="0" smtClean="0"/>
+            <a:endParaRPr lang="en-US" altLang="ko-KR" dirty="0"/>
           </a:p>
           <a:p>
             <a:pPr lvl="1"/>
             <a:r>
-              <a:rPr lang="ko-KR" altLang="en-US" dirty="0" smtClean="0"/>
+              <a:rPr lang="ko-KR" altLang="en-US" dirty="0"/>
               <a:t>웹 브라우저가 알려주는 </a:t>
             </a:r>
             <a:r>
-              <a:rPr lang="en-US" altLang="ko-KR" dirty="0" smtClean="0"/>
+              <a:rPr lang="en-US" altLang="ko-KR" dirty="0"/>
               <a:t>HTML </a:t>
             </a:r>
             <a:r>
-              <a:rPr lang="ko-KR" altLang="en-US" dirty="0" smtClean="0"/>
+              <a:rPr lang="ko-KR" altLang="en-US" dirty="0"/>
               <a:t>요소에 대한 사건</a:t>
             </a:r>
-            <a:endParaRPr lang="en-US" altLang="ko-KR" dirty="0" smtClean="0"/>
+            <a:endParaRPr lang="en-US" altLang="ko-KR" dirty="0"/>
           </a:p>
           <a:p>
             <a:pPr lvl="1"/>
             <a:r>
-              <a:rPr lang="en-US" altLang="ko-KR" dirty="0" smtClean="0"/>
+              <a:rPr lang="en-US" altLang="ko-KR" dirty="0"/>
               <a:t>Ex. </a:t>
             </a:r>
             <a:r>
-              <a:rPr lang="ko-KR" altLang="en-US" dirty="0" smtClean="0"/>
+              <a:rPr lang="ko-KR" altLang="en-US" dirty="0"/>
               <a:t>클릭</a:t>
             </a:r>
             <a:r>
-              <a:rPr lang="en-US" altLang="ko-KR" dirty="0" smtClean="0"/>
+              <a:rPr lang="en-US" altLang="ko-KR" dirty="0"/>
               <a:t>, </a:t>
             </a:r>
             <a:r>
-              <a:rPr lang="ko-KR" altLang="en-US" dirty="0" smtClean="0"/>
+              <a:rPr lang="ko-KR" altLang="en-US" dirty="0"/>
               <a:t>스크롤</a:t>
             </a:r>
             <a:r>
-              <a:rPr lang="en-US" altLang="ko-KR" dirty="0" smtClean="0"/>
+              <a:rPr lang="en-US" altLang="ko-KR" dirty="0"/>
               <a:t>, </a:t>
             </a:r>
             <a:r>
-              <a:rPr lang="ko-KR" altLang="en-US" dirty="0" err="1" smtClean="0"/>
+              <a:rPr lang="ko-KR" altLang="en-US" dirty="0" err="1"/>
               <a:t>마우스오버</a:t>
             </a:r>
             <a:r>
-              <a:rPr lang="ko-KR" altLang="en-US" dirty="0" smtClean="0"/>
+              <a:rPr lang="ko-KR" altLang="en-US" dirty="0"/>
               <a:t> 등</a:t>
             </a:r>
-            <a:endParaRPr lang="en-US" altLang="ko-KR" dirty="0" smtClean="0"/>
+            <a:endParaRPr lang="en-US" altLang="ko-KR" dirty="0"/>
           </a:p>
         </p:txBody>
       </p:sp>
@@ -11586,10 +11422,9 @@
               <a:t>.  </a:t>
             </a:r>
             <a:r>
-              <a:rPr lang="ko-KR" altLang="en-US" dirty="0" smtClean="0"/>
+              <a:rPr lang="ko-KR" altLang="en-US" dirty="0"/>
               <a:t>스케줄 등록하기</a:t>
             </a:r>
-            <a:endParaRPr lang="ko-KR" altLang="en-US" dirty="0"/>
           </a:p>
         </p:txBody>
       </p:sp>
@@ -11863,15 +11698,6 @@
               </a:rPr>
               <a:t>강의 클릭</a:t>
             </a:r>
-            <a:r>
-              <a:rPr lang="en-US" altLang="ko-KR" dirty="0">
-                <a:solidFill>
-                  <a:srgbClr val="212529"/>
-                </a:solidFill>
-                <a:latin typeface="+mn-ea"/>
-              </a:rPr>
-              <a:t/>
-            </a:r>
             <a:br>
               <a:rPr lang="en-US" altLang="ko-KR" dirty="0">
                 <a:solidFill>
@@ -11899,34 +11725,16 @@
               <a:t>➡ </a:t>
             </a:r>
             <a:r>
-              <a:rPr lang="en-US" altLang="ko-KR" sz="2800" b="1" dirty="0" smtClean="0">
+              <a:rPr lang="en-US" altLang="ko-KR" sz="2800" b="1" dirty="0">
                 <a:solidFill>
                   <a:srgbClr val="212529"/>
                 </a:solidFill>
                 <a:latin typeface="+mn-ea"/>
               </a:rPr>
-              <a:t>[</a:t>
-            </a:r>
-            <a:r>
-              <a:rPr lang="en-US" altLang="ko-KR" sz="2800" b="1" dirty="0" smtClean="0">
-                <a:solidFill>
-                  <a:srgbClr val="212529"/>
-                </a:solidFill>
-                <a:latin typeface="+mn-ea"/>
-              </a:rPr>
-              <a:t>jQuery</a:t>
-            </a:r>
-            <a:r>
-              <a:rPr lang="en-US" altLang="ko-KR" sz="2800" b="1" dirty="0" smtClean="0">
-                <a:solidFill>
-                  <a:srgbClr val="212529"/>
-                </a:solidFill>
-                <a:latin typeface="+mn-ea"/>
-              </a:rPr>
-              <a:t> </a:t>
-            </a:r>
-            <a:r>
-              <a:rPr lang="ko-KR" altLang="en-US" sz="2800" b="1" dirty="0" smtClean="0">
+              <a:t>[jQuery </a:t>
+            </a:r>
+            <a:r>
+              <a:rPr lang="ko-KR" altLang="en-US" sz="2800" b="1" dirty="0">
                 <a:solidFill>
                   <a:srgbClr val="212529"/>
                 </a:solidFill>
@@ -11935,7 +11743,7 @@
               <a:t>실습</a:t>
             </a:r>
             <a:r>
-              <a:rPr lang="en-US" altLang="ko-KR" sz="2800" b="1" dirty="0" smtClean="0">
+              <a:rPr lang="en-US" altLang="ko-KR" sz="2800" b="1" dirty="0">
                 <a:solidFill>
                   <a:srgbClr val="212529"/>
                 </a:solidFill>
@@ -11944,7 +11752,7 @@
               <a:t>]</a:t>
             </a:r>
             <a:r>
-              <a:rPr lang="en-US" altLang="ko-KR" sz="2800" dirty="0" smtClean="0">
+              <a:rPr lang="en-US" altLang="ko-KR" sz="2800" dirty="0">
                 <a:solidFill>
                   <a:srgbClr val="212529"/>
                 </a:solidFill>
@@ -11980,7 +11788,7 @@
               <a:t>➡ </a:t>
             </a:r>
             <a:r>
-              <a:rPr lang="en-US" altLang="ko-KR" sz="2800" b="1" dirty="0" smtClean="0">
+              <a:rPr lang="en-US" altLang="ko-KR" sz="2800" b="1" dirty="0">
                 <a:solidFill>
                   <a:schemeClr val="accent1"/>
                 </a:solidFill>
@@ -11989,7 +11797,7 @@
               <a:t>[</a:t>
             </a:r>
             <a:r>
-              <a:rPr lang="ko-KR" altLang="en-US" sz="2800" b="1" dirty="0" smtClean="0">
+              <a:rPr lang="ko-KR" altLang="en-US" sz="2800" b="1" dirty="0">
                 <a:solidFill>
                   <a:schemeClr val="accent1"/>
                 </a:solidFill>
@@ -11998,7 +11806,7 @@
               <a:t>스케줄 등록하기</a:t>
             </a:r>
             <a:r>
-              <a:rPr lang="en-US" altLang="ko-KR" sz="2800" b="1" dirty="0" smtClean="0">
+              <a:rPr lang="en-US" altLang="ko-KR" sz="2800" b="1" dirty="0">
                 <a:solidFill>
                   <a:schemeClr val="accent1"/>
                 </a:solidFill>
@@ -12007,7 +11815,7 @@
               <a:t>]</a:t>
             </a:r>
             <a:r>
-              <a:rPr lang="en-US" altLang="ko-KR" sz="2800" dirty="0" smtClean="0">
+              <a:rPr lang="en-US" altLang="ko-KR" sz="2800" dirty="0">
                 <a:solidFill>
                   <a:schemeClr val="accent1"/>
                 </a:solidFill>
@@ -12016,22 +11824,13 @@
               <a:t> </a:t>
             </a:r>
             <a:r>
-              <a:rPr lang="ko-KR" altLang="en-US" sz="2800" dirty="0" smtClean="0">
+              <a:rPr lang="ko-KR" altLang="en-US" sz="2800" dirty="0">
                 <a:solidFill>
                   <a:srgbClr val="212529"/>
                 </a:solidFill>
                 <a:latin typeface="+mn-ea"/>
               </a:rPr>
-              <a:t> </a:t>
-            </a:r>
-            <a:r>
-              <a:rPr lang="ko-KR" altLang="en-US" sz="2800" dirty="0">
-                <a:solidFill>
-                  <a:srgbClr val="212529"/>
-                </a:solidFill>
-                <a:latin typeface="+mn-ea"/>
-              </a:rPr>
-              <a:t>진행</a:t>
+              <a:t> 진행</a:t>
             </a:r>
           </a:p>
         </p:txBody>
@@ -12162,10 +11961,9 @@
               <a:t>. </a:t>
             </a:r>
             <a:r>
-              <a:rPr lang="ko-KR" altLang="en-US" dirty="0" smtClean="0"/>
+              <a:rPr lang="ko-KR" altLang="en-US" dirty="0"/>
               <a:t>스케줄 등록하기</a:t>
             </a:r>
-            <a:endParaRPr lang="ko-KR" altLang="en-US" dirty="0"/>
           </a:p>
         </p:txBody>
       </p:sp>
@@ -12524,519 +12322,6 @@
 </p:sld>
 </file>
 
-<file path=ppt/slides/slide27.xml><?xml version="1.0" encoding="utf-8"?>
-<p:sld xmlns:a="http://schemas.openxmlformats.org/drawingml/2006/main" xmlns:r="http://schemas.openxmlformats.org/officeDocument/2006/relationships" xmlns:p="http://schemas.openxmlformats.org/presentationml/2006/main">
-  <p:cSld>
-    <p:spTree>
-      <p:nvGrpSpPr>
-        <p:cNvPr id="1" name=""/>
-        <p:cNvGrpSpPr/>
-        <p:nvPr/>
-      </p:nvGrpSpPr>
-      <p:grpSpPr>
-        <a:xfrm>
-          <a:off x="0" y="0"/>
-          <a:ext cx="0" cy="0"/>
-          <a:chOff x="0" y="0"/>
-          <a:chExt cx="0" cy="0"/>
-        </a:xfrm>
-      </p:grpSpPr>
-      <p:sp>
-        <p:nvSpPr>
-          <p:cNvPr id="4" name="날짜 개체 틀 3">
-            <a:extLst>
-              <a:ext uri="{FF2B5EF4-FFF2-40B4-BE49-F238E27FC236}">
-                <a16:creationId xmlns:a16="http://schemas.microsoft.com/office/drawing/2014/main" id="{A695DDE5-0A39-A366-4CFE-A283911999CD}"/>
-              </a:ext>
-            </a:extLst>
-          </p:cNvPr>
-          <p:cNvSpPr>
-            <a:spLocks noGrp="1"/>
-          </p:cNvSpPr>
-          <p:nvPr>
-            <p:ph type="dt" sz="half" idx="10"/>
-          </p:nvPr>
-        </p:nvSpPr>
-        <p:spPr/>
-        <p:txBody>
-          <a:bodyPr/>
-          <a:lstStyle/>
-          <a:p>
-            <a:fld id="{F0886D69-58DA-4CDE-BB12-DBE7AA6E41A5}" type="datetime6">
-              <a:rPr lang="ko-KR" altLang="en-US" smtClean="0"/>
-              <a:t>2024년 6월</a:t>
-            </a:fld>
-            <a:endParaRPr lang="ko-KR" altLang="en-US"/>
-          </a:p>
-        </p:txBody>
-      </p:sp>
-      <p:sp>
-        <p:nvSpPr>
-          <p:cNvPr id="3" name="슬라이드 번호 개체 틀 2">
-            <a:extLst>
-              <a:ext uri="{FF2B5EF4-FFF2-40B4-BE49-F238E27FC236}">
-                <a16:creationId xmlns:a16="http://schemas.microsoft.com/office/drawing/2014/main" id="{21E4E5AE-2336-D548-D0E4-14BF2A3750BE}"/>
-              </a:ext>
-            </a:extLst>
-          </p:cNvPr>
-          <p:cNvSpPr>
-            <a:spLocks noGrp="1"/>
-          </p:cNvSpPr>
-          <p:nvPr>
-            <p:ph type="sldNum" sz="quarter" idx="12"/>
-          </p:nvPr>
-        </p:nvSpPr>
-        <p:spPr/>
-        <p:txBody>
-          <a:bodyPr/>
-          <a:lstStyle/>
-          <a:p>
-            <a:fld id="{083A2CE0-18CD-4102-B738-4ACFF9E68BA4}" type="slidenum">
-              <a:rPr lang="ko-KR" altLang="en-US" smtClean="0"/>
-              <a:t>27</a:t>
-            </a:fld>
-            <a:endParaRPr lang="ko-KR" altLang="en-US"/>
-          </a:p>
-        </p:txBody>
-      </p:sp>
-      <p:sp>
-        <p:nvSpPr>
-          <p:cNvPr id="2" name="제목 1">
-            <a:extLst>
-              <a:ext uri="{FF2B5EF4-FFF2-40B4-BE49-F238E27FC236}">
-                <a16:creationId xmlns:a16="http://schemas.microsoft.com/office/drawing/2014/main" id="{5FAC57F5-99D7-9C46-B6C1-D16224151FE9}"/>
-              </a:ext>
-            </a:extLst>
-          </p:cNvPr>
-          <p:cNvSpPr>
-            <a:spLocks noGrp="1"/>
-          </p:cNvSpPr>
-          <p:nvPr>
-            <p:ph type="title"/>
-          </p:nvPr>
-        </p:nvSpPr>
-        <p:spPr>
-          <a:xfrm>
-            <a:off x="304800" y="239650"/>
-            <a:ext cx="11887200" cy="1325563"/>
-          </a:xfrm>
-        </p:spPr>
-        <p:txBody>
-          <a:bodyPr/>
-          <a:lstStyle/>
-          <a:p>
-            <a:r>
-              <a:rPr lang="ko-KR" altLang="en-US" dirty="0" smtClean="0">
-                <a:solidFill>
-                  <a:schemeClr val="accent1"/>
-                </a:solidFill>
-              </a:rPr>
-              <a:t>프로젝트</a:t>
-            </a:r>
-            <a:r>
-              <a:rPr lang="en-US" altLang="ko-KR" dirty="0" smtClean="0">
-                <a:solidFill>
-                  <a:schemeClr val="accent1"/>
-                </a:solidFill>
-              </a:rPr>
-              <a:t>.</a:t>
-            </a:r>
-            <a:r>
-              <a:rPr lang="en-US" altLang="ko-KR" dirty="0" smtClean="0"/>
-              <a:t> HTML, CSS(Bootstrap), JS(jQuery)</a:t>
-            </a:r>
-            <a:endParaRPr lang="ko-KR" altLang="en-US" dirty="0"/>
-          </a:p>
-        </p:txBody>
-      </p:sp>
-      <p:sp>
-        <p:nvSpPr>
-          <p:cNvPr id="5" name="내용 개체 틀 2">
-            <a:extLst>
-              <a:ext uri="{FF2B5EF4-FFF2-40B4-BE49-F238E27FC236}">
-                <a16:creationId xmlns:a16="http://schemas.microsoft.com/office/drawing/2014/main" id="{9C5A75B8-EF16-1130-6BC7-3D223DA08847}"/>
-              </a:ext>
-            </a:extLst>
-          </p:cNvPr>
-          <p:cNvSpPr txBox="1">
-            <a:spLocks/>
-          </p:cNvSpPr>
-          <p:nvPr/>
-        </p:nvSpPr>
-        <p:spPr>
-          <a:xfrm>
-            <a:off x="448962" y="1692473"/>
-            <a:ext cx="11294076" cy="4420329"/>
-          </a:xfrm>
-          <a:prstGeom prst="rect">
-            <a:avLst/>
-          </a:prstGeom>
-        </p:spPr>
-        <p:txBody>
-          <a:bodyPr vert="horz" lIns="91440" tIns="45720" rIns="91440" bIns="45720" rtlCol="0">
-            <a:normAutofit/>
-          </a:bodyPr>
-          <a:lstStyle>
-            <a:lvl1pPr marL="228600" indent="-228600" algn="l" defTabSz="914400" rtl="0" eaLnBrk="1" latinLnBrk="1" hangingPunct="1">
-              <a:lnSpc>
-                <a:spcPct val="90000"/>
-              </a:lnSpc>
-              <a:spcBef>
-                <a:spcPts val="1000"/>
-              </a:spcBef>
-              <a:buFont typeface="Arial" panose="020B0604020202020204" pitchFamily="34" charset="0"/>
-              <a:buChar char="•"/>
-              <a:defRPr sz="2800" kern="1200">
-                <a:solidFill>
-                  <a:schemeClr val="tx1"/>
-                </a:solidFill>
-                <a:latin typeface="+mn-lt"/>
-                <a:ea typeface="+mn-ea"/>
-                <a:cs typeface="+mn-cs"/>
-              </a:defRPr>
-            </a:lvl1pPr>
-            <a:lvl2pPr marL="685800" indent="-228600" algn="l" defTabSz="914400" rtl="0" eaLnBrk="1" latinLnBrk="1" hangingPunct="1">
-              <a:lnSpc>
-                <a:spcPct val="90000"/>
-              </a:lnSpc>
-              <a:spcBef>
-                <a:spcPts val="500"/>
-              </a:spcBef>
-              <a:buFont typeface="Arial" panose="020B0604020202020204" pitchFamily="34" charset="0"/>
-              <a:buChar char="•"/>
-              <a:defRPr sz="2400" kern="1200">
-                <a:solidFill>
-                  <a:schemeClr val="tx1"/>
-                </a:solidFill>
-                <a:latin typeface="+mn-lt"/>
-                <a:ea typeface="+mn-ea"/>
-                <a:cs typeface="+mn-cs"/>
-              </a:defRPr>
-            </a:lvl2pPr>
-            <a:lvl3pPr marL="1143000" indent="-228600" algn="l" defTabSz="914400" rtl="0" eaLnBrk="1" latinLnBrk="1" hangingPunct="1">
-              <a:lnSpc>
-                <a:spcPct val="90000"/>
-              </a:lnSpc>
-              <a:spcBef>
-                <a:spcPts val="500"/>
-              </a:spcBef>
-              <a:buFont typeface="Arial" panose="020B0604020202020204" pitchFamily="34" charset="0"/>
-              <a:buChar char="•"/>
-              <a:defRPr sz="2000" kern="1200">
-                <a:solidFill>
-                  <a:schemeClr val="tx1"/>
-                </a:solidFill>
-                <a:latin typeface="+mn-lt"/>
-                <a:ea typeface="+mn-ea"/>
-                <a:cs typeface="+mn-cs"/>
-              </a:defRPr>
-            </a:lvl3pPr>
-            <a:lvl4pPr marL="1600200" indent="-228600" algn="l" defTabSz="914400" rtl="0" eaLnBrk="1" latinLnBrk="1" hangingPunct="1">
-              <a:lnSpc>
-                <a:spcPct val="90000"/>
-              </a:lnSpc>
-              <a:spcBef>
-                <a:spcPts val="500"/>
-              </a:spcBef>
-              <a:buFont typeface="Arial" panose="020B0604020202020204" pitchFamily="34" charset="0"/>
-              <a:buChar char="•"/>
-              <a:defRPr sz="1800" kern="1200">
-                <a:solidFill>
-                  <a:schemeClr val="tx1"/>
-                </a:solidFill>
-                <a:latin typeface="+mn-lt"/>
-                <a:ea typeface="+mn-ea"/>
-                <a:cs typeface="+mn-cs"/>
-              </a:defRPr>
-            </a:lvl4pPr>
-            <a:lvl5pPr marL="2057400" indent="-228600" algn="l" defTabSz="914400" rtl="0" eaLnBrk="1" latinLnBrk="1" hangingPunct="1">
-              <a:lnSpc>
-                <a:spcPct val="90000"/>
-              </a:lnSpc>
-              <a:spcBef>
-                <a:spcPts val="500"/>
-              </a:spcBef>
-              <a:buFont typeface="Arial" panose="020B0604020202020204" pitchFamily="34" charset="0"/>
-              <a:buChar char="•"/>
-              <a:defRPr sz="1800" kern="1200">
-                <a:solidFill>
-                  <a:schemeClr val="tx1"/>
-                </a:solidFill>
-                <a:latin typeface="+mn-lt"/>
-                <a:ea typeface="+mn-ea"/>
-                <a:cs typeface="+mn-cs"/>
-              </a:defRPr>
-            </a:lvl5pPr>
-            <a:lvl6pPr marL="2514600" indent="-228600" algn="l" defTabSz="914400" rtl="0" eaLnBrk="1" latinLnBrk="1" hangingPunct="1">
-              <a:lnSpc>
-                <a:spcPct val="90000"/>
-              </a:lnSpc>
-              <a:spcBef>
-                <a:spcPts val="500"/>
-              </a:spcBef>
-              <a:buFont typeface="Arial" panose="020B0604020202020204" pitchFamily="34" charset="0"/>
-              <a:buChar char="•"/>
-              <a:defRPr sz="1800" kern="1200">
-                <a:solidFill>
-                  <a:schemeClr val="tx1"/>
-                </a:solidFill>
-                <a:latin typeface="+mn-lt"/>
-                <a:ea typeface="+mn-ea"/>
-                <a:cs typeface="+mn-cs"/>
-              </a:defRPr>
-            </a:lvl6pPr>
-            <a:lvl7pPr marL="2971800" indent="-228600" algn="l" defTabSz="914400" rtl="0" eaLnBrk="1" latinLnBrk="1" hangingPunct="1">
-              <a:lnSpc>
-                <a:spcPct val="90000"/>
-              </a:lnSpc>
-              <a:spcBef>
-                <a:spcPts val="500"/>
-              </a:spcBef>
-              <a:buFont typeface="Arial" panose="020B0604020202020204" pitchFamily="34" charset="0"/>
-              <a:buChar char="•"/>
-              <a:defRPr sz="1800" kern="1200">
-                <a:solidFill>
-                  <a:schemeClr val="tx1"/>
-                </a:solidFill>
-                <a:latin typeface="+mn-lt"/>
-                <a:ea typeface="+mn-ea"/>
-                <a:cs typeface="+mn-cs"/>
-              </a:defRPr>
-            </a:lvl7pPr>
-            <a:lvl8pPr marL="3429000" indent="-228600" algn="l" defTabSz="914400" rtl="0" eaLnBrk="1" latinLnBrk="1" hangingPunct="1">
-              <a:lnSpc>
-                <a:spcPct val="90000"/>
-              </a:lnSpc>
-              <a:spcBef>
-                <a:spcPts val="500"/>
-              </a:spcBef>
-              <a:buFont typeface="Arial" panose="020B0604020202020204" pitchFamily="34" charset="0"/>
-              <a:buChar char="•"/>
-              <a:defRPr sz="1800" kern="1200">
-                <a:solidFill>
-                  <a:schemeClr val="tx1"/>
-                </a:solidFill>
-                <a:latin typeface="+mn-lt"/>
-                <a:ea typeface="+mn-ea"/>
-                <a:cs typeface="+mn-cs"/>
-              </a:defRPr>
-            </a:lvl8pPr>
-            <a:lvl9pPr marL="3886200" indent="-228600" algn="l" defTabSz="914400" rtl="0" eaLnBrk="1" latinLnBrk="1" hangingPunct="1">
-              <a:lnSpc>
-                <a:spcPct val="90000"/>
-              </a:lnSpc>
-              <a:spcBef>
-                <a:spcPts val="500"/>
-              </a:spcBef>
-              <a:buFont typeface="Arial" panose="020B0604020202020204" pitchFamily="34" charset="0"/>
-              <a:buChar char="•"/>
-              <a:defRPr sz="1800" kern="1200">
-                <a:solidFill>
-                  <a:schemeClr val="tx1"/>
-                </a:solidFill>
-                <a:latin typeface="+mn-lt"/>
-                <a:ea typeface="+mn-ea"/>
-                <a:cs typeface="+mn-cs"/>
-              </a:defRPr>
-            </a:lvl9pPr>
-          </a:lstStyle>
-          <a:p>
-            <a:pPr marL="0" indent="0">
-              <a:lnSpc>
-                <a:spcPct val="120000"/>
-              </a:lnSpc>
-              <a:buFont typeface="Arial" panose="020B0604020202020204" pitchFamily="34" charset="0"/>
-              <a:buNone/>
-            </a:pPr>
-            <a:r>
-              <a:rPr lang="ko-KR" altLang="en-US" dirty="0"/>
-              <a:t>조건 </a:t>
-            </a:r>
-            <a:r>
-              <a:rPr lang="en-US" altLang="ko-KR" dirty="0"/>
-              <a:t>1. </a:t>
-            </a:r>
-            <a:r>
-              <a:rPr lang="en-US" altLang="ko-KR" dirty="0" smtClean="0"/>
-              <a:t>JavaScript </a:t>
-            </a:r>
-            <a:r>
-              <a:rPr lang="ko-KR" altLang="en-US" dirty="0"/>
-              <a:t>라이브러리 사용하기</a:t>
-            </a:r>
-            <a:endParaRPr lang="en-US" altLang="ko-KR" dirty="0"/>
-          </a:p>
-          <a:p>
-            <a:pPr marL="0" indent="0">
-              <a:lnSpc>
-                <a:spcPct val="120000"/>
-              </a:lnSpc>
-              <a:buFont typeface="Arial" panose="020B0604020202020204" pitchFamily="34" charset="0"/>
-              <a:buNone/>
-            </a:pPr>
-            <a:r>
-              <a:rPr lang="en-US" altLang="ko-KR" sz="2400" dirty="0" smtClean="0"/>
-              <a:t>	ex</a:t>
-            </a:r>
-            <a:r>
-              <a:rPr lang="en-US" altLang="ko-KR" sz="2400" dirty="0"/>
-              <a:t>) </a:t>
-            </a:r>
-            <a:r>
-              <a:rPr lang="en-US" altLang="ko-KR" sz="2400" dirty="0" err="1"/>
-              <a:t>Sweetalert</a:t>
-            </a:r>
-            <a:r>
-              <a:rPr lang="en-US" altLang="ko-KR" sz="2400" dirty="0"/>
-              <a:t>, Chart.js, Scroll, </a:t>
-            </a:r>
-            <a:r>
-              <a:rPr lang="en-US" altLang="ko-KR" sz="2400" dirty="0" err="1"/>
-              <a:t>Fullpage</a:t>
-            </a:r>
-            <a:r>
-              <a:rPr lang="en-US" altLang="ko-KR" sz="2400" dirty="0"/>
-              <a:t> </a:t>
-            </a:r>
-            <a:r>
-              <a:rPr lang="ko-KR" altLang="en-US" sz="2400" dirty="0"/>
-              <a:t>등등</a:t>
-            </a:r>
-            <a:endParaRPr lang="en-US" altLang="ko-KR" sz="2400" dirty="0"/>
-          </a:p>
-          <a:p>
-            <a:pPr marL="0" indent="0">
-              <a:lnSpc>
-                <a:spcPct val="120000"/>
-              </a:lnSpc>
-              <a:buFont typeface="Arial" panose="020B0604020202020204" pitchFamily="34" charset="0"/>
-              <a:buNone/>
-            </a:pPr>
-            <a:endParaRPr lang="en-US" altLang="ko-KR" sz="2400" dirty="0"/>
-          </a:p>
-          <a:p>
-            <a:pPr marL="0" indent="0">
-              <a:lnSpc>
-                <a:spcPct val="120000"/>
-              </a:lnSpc>
-              <a:buFont typeface="Arial" panose="020B0604020202020204" pitchFamily="34" charset="0"/>
-              <a:buNone/>
-            </a:pPr>
-            <a:r>
-              <a:rPr lang="ko-KR" altLang="en-US" dirty="0"/>
-              <a:t>조건</a:t>
-            </a:r>
-            <a:r>
-              <a:rPr lang="en-US" altLang="ko-KR" dirty="0"/>
-              <a:t> 2. Bootstrap Component </a:t>
-            </a:r>
-            <a:r>
-              <a:rPr lang="ko-KR" altLang="en-US" dirty="0"/>
-              <a:t>또는 </a:t>
-            </a:r>
-            <a:r>
-              <a:rPr lang="en-US" altLang="ko-KR" dirty="0"/>
-              <a:t>Utility</a:t>
-            </a:r>
-            <a:r>
-              <a:rPr lang="ko-KR" altLang="en-US" dirty="0"/>
-              <a:t> </a:t>
-            </a:r>
-            <a:r>
-              <a:rPr lang="en-US" altLang="ko-KR" dirty="0"/>
-              <a:t>5</a:t>
-            </a:r>
-            <a:r>
-              <a:rPr lang="ko-KR" altLang="en-US" dirty="0"/>
-              <a:t>개 이상 </a:t>
-            </a:r>
-            <a:r>
-              <a:rPr lang="ko-KR" altLang="en-US" dirty="0" smtClean="0"/>
-              <a:t>사용하기</a:t>
-            </a:r>
-            <a:endParaRPr lang="en-US" altLang="ko-KR" dirty="0" smtClean="0"/>
-          </a:p>
-          <a:p>
-            <a:pPr marL="0" indent="0">
-              <a:lnSpc>
-                <a:spcPct val="120000"/>
-              </a:lnSpc>
-              <a:buFont typeface="Arial" panose="020B0604020202020204" pitchFamily="34" charset="0"/>
-              <a:buNone/>
-            </a:pPr>
-            <a:r>
-              <a:rPr lang="en-US" altLang="ko-KR" sz="2400" dirty="0"/>
-              <a:t>	</a:t>
-            </a:r>
-            <a:r>
-              <a:rPr lang="en-US" altLang="ko-KR" sz="2400" dirty="0" smtClean="0"/>
-              <a:t>(CSS </a:t>
-            </a:r>
-            <a:r>
-              <a:rPr lang="ko-KR" altLang="en-US" sz="2400" dirty="0" smtClean="0"/>
-              <a:t>프레임워크는 반드시 </a:t>
-            </a:r>
-            <a:r>
-              <a:rPr lang="en-US" altLang="ko-KR" sz="2400" dirty="0" smtClean="0"/>
-              <a:t>Bootstrap</a:t>
-            </a:r>
-            <a:r>
-              <a:rPr lang="ko-KR" altLang="en-US" sz="2400" dirty="0" smtClean="0"/>
-              <a:t>일 필요는 없음</a:t>
-            </a:r>
-            <a:r>
-              <a:rPr lang="en-US" altLang="ko-KR" sz="2400" dirty="0" smtClean="0"/>
-              <a:t>)</a:t>
-            </a:r>
-            <a:endParaRPr lang="en-US" altLang="ko-KR" sz="2400" dirty="0"/>
-          </a:p>
-          <a:p>
-            <a:pPr marL="0" indent="0">
-              <a:lnSpc>
-                <a:spcPct val="120000"/>
-              </a:lnSpc>
-              <a:buFont typeface="Arial" panose="020B0604020202020204" pitchFamily="34" charset="0"/>
-              <a:buNone/>
-            </a:pPr>
-            <a:endParaRPr lang="en-US" altLang="ko-KR" sz="2400" dirty="0"/>
-          </a:p>
-          <a:p>
-            <a:pPr marL="0" indent="0">
-              <a:lnSpc>
-                <a:spcPct val="120000"/>
-              </a:lnSpc>
-              <a:buFont typeface="Arial" panose="020B0604020202020204" pitchFamily="34" charset="0"/>
-              <a:buNone/>
-            </a:pPr>
-            <a:r>
-              <a:rPr lang="ko-KR" altLang="en-US" dirty="0"/>
-              <a:t>조건 </a:t>
-            </a:r>
-            <a:r>
-              <a:rPr lang="en-US" altLang="ko-KR" dirty="0"/>
-              <a:t>3. </a:t>
-            </a:r>
-            <a:r>
-              <a:rPr lang="ko-KR" altLang="en-US" dirty="0"/>
-              <a:t>반응형 페이지로 만들기</a:t>
-            </a:r>
-            <a:endParaRPr lang="en-US" altLang="ko-KR" dirty="0"/>
-          </a:p>
-        </p:txBody>
-      </p:sp>
-    </p:spTree>
-    <p:extLst>
-      <p:ext uri="{BB962C8B-B14F-4D97-AF65-F5344CB8AC3E}">
-        <p14:creationId xmlns:p14="http://schemas.microsoft.com/office/powerpoint/2010/main" val="1649746298"/>
-      </p:ext>
-    </p:extLst>
-  </p:cSld>
-  <p:clrMapOvr>
-    <a:masterClrMapping/>
-  </p:clrMapOvr>
-</p:sld>
-</file>
-
 <file path=ppt/slides/slide3.xml><?xml version="1.0" encoding="utf-8"?>
 <p:sld xmlns:a="http://schemas.openxmlformats.org/drawingml/2006/main" xmlns:r="http://schemas.openxmlformats.org/officeDocument/2006/relationships" xmlns:p="http://schemas.openxmlformats.org/presentationml/2006/main">
   <p:cSld>
@@ -13341,18 +12626,10 @@
               <a:buNone/>
             </a:pPr>
             <a:r>
-              <a:rPr lang="ko-KR" altLang="en-US" dirty="0" smtClean="0"/>
-              <a:t>자바스크립트 </a:t>
-            </a:r>
-            <a:r>
               <a:rPr lang="ko-KR" altLang="en-US" dirty="0"/>
-              <a:t>언어를 간편하게 사용할 수 있도록 단순화시킨 오픈 소스 </a:t>
-            </a:r>
-            <a:r>
-              <a:rPr lang="ko-KR" altLang="en-US" dirty="0" smtClean="0"/>
-              <a:t>기반의</a:t>
-            </a:r>
-            <a:endParaRPr lang="en-US" altLang="ko-KR" dirty="0" smtClean="0"/>
+              <a:t>자바스크립트 언어를 간편하게 사용할 수 있도록 단순화시킨 오픈 소스 기반의</a:t>
+            </a:r>
+            <a:endParaRPr lang="en-US" altLang="ko-KR" dirty="0"/>
           </a:p>
           <a:p>
             <a:pPr marL="0" indent="0">
@@ -13363,7 +12640,7 @@
               <a:buNone/>
             </a:pPr>
             <a:r>
-              <a:rPr lang="ko-KR" altLang="en-US" dirty="0" smtClean="0">
+              <a:rPr lang="ko-KR" altLang="en-US" dirty="0">
                 <a:solidFill>
                   <a:schemeClr val="accent1"/>
                 </a:solidFill>

--- a/material/[SeSAC_YDP_6] 06_jQuery.pptx
+++ b/material/[SeSAC_YDP_6] 06_jQuery.pptx
@@ -225,7 +225,7 @@
           <a:p>
             <a:fld id="{2EF3F159-7250-4DD4-91C2-13B35D56E1AF}" type="datetimeFigureOut">
               <a:rPr lang="ko-KR" altLang="en-US" smtClean="0"/>
-              <a:t>2024-06-03</a:t>
+              <a:t>2024-06-18</a:t>
             </a:fld>
             <a:endParaRPr lang="ko-KR" altLang="en-US"/>
           </a:p>
@@ -6350,16 +6350,14 @@
           <a:p>
             <a:r>
               <a:rPr lang="en-US" altLang="ko-KR" dirty="0" err="1"/>
-              <a:t>SeSAC</a:t>
-            </a:r>
-            <a:r>
-              <a:rPr lang="en-US" altLang="ko-KR" dirty="0"/>
-              <a:t> x </a:t>
-            </a:r>
-            <a:r>
-              <a:rPr lang="en-US" altLang="ko-KR" dirty="0" err="1"/>
-              <a:t>CODINGOn</a:t>
-            </a:r>
+              <a:t>CodingOn</a:t>
+            </a:r>
+            <a:endParaRPr lang="ko-KR" altLang="en-US"/>
+          </a:p>
+          <a:p>
+            <a:endParaRPr lang="ko-KR" altLang="en-US" dirty="0"/>
+          </a:p>
+          <a:p>
             <a:endParaRPr lang="ko-KR" altLang="en-US" dirty="0"/>
           </a:p>
         </p:txBody>
@@ -8752,7 +8750,7 @@
           <a:p>
             <a:fld id="{0F78D9C4-20C1-4B15-A116-16DC77AD9A1E}" type="datetime1">
               <a:rPr lang="ko-KR" altLang="en-US" smtClean="0"/>
-              <a:t>2024-06-03</a:t>
+              <a:t>2024-06-18</a:t>
             </a:fld>
             <a:endParaRPr lang="ko-KR" altLang="en-US"/>
           </a:p>
@@ -9332,7 +9330,7 @@
           <a:p>
             <a:fld id="{0F78D9C4-20C1-4B15-A116-16DC77AD9A1E}" type="datetime1">
               <a:rPr lang="ko-KR" altLang="en-US" smtClean="0"/>
-              <a:t>2024-06-03</a:t>
+              <a:t>2024-06-18</a:t>
             </a:fld>
             <a:endParaRPr lang="ko-KR" altLang="en-US"/>
           </a:p>
@@ -11349,7 +11347,7 @@
           <a:p>
             <a:fld id="{0F78D9C4-20C1-4B15-A116-16DC77AD9A1E}" type="datetime1">
               <a:rPr lang="ko-KR" altLang="en-US" smtClean="0"/>
-              <a:t>2024-06-03</a:t>
+              <a:t>2024-06-18</a:t>
             </a:fld>
             <a:endParaRPr lang="ko-KR" altLang="en-US"/>
           </a:p>
